--- a/docs/презентация.pptx
+++ b/docs/презентация.pptx
@@ -6,6 +6,7 @@
   </p:sldMasterIdLst>
   <p:sldIdLst>
     <p:sldId id="256" r:id="rId7"/>
+    <p:sldId id="266" r:id="rId17"/>
     <p:sldId id="257" r:id="rId8"/>
     <p:sldId id="258" r:id="rId9"/>
     <p:sldId id="259" r:id="rId10"/>
@@ -3113,7 +3114,8 @@
           <a:lstStyle/>
           <a:p>
             <a:r>
-              <a:t>Графовая СУБД: учебный проект</a:t>
+              <a:rPr/>
+              <a:t>Графовая СУБД: курсовая работа</a:t>
             </a:r>
           </a:p>
         </p:txBody>
@@ -3134,6 +3136,7 @@
           <a:lstStyle/>
           <a:p>
             <a:r>
+              <a:rPr/>
               <a:t>Хранение и редактирование графов (Neo4j + клиент wxPython)</a:t>
             </a:r>
           </a:p>
@@ -3173,9 +3176,45 @@
           <a:lstStyle/>
           <a:p>
             <a:r>
-              <a:t>Итог</a:t>
-            </a:r>
-          </a:p>
+              <a:rPr/>
+              <a:t>Спасибо за внимание!</a:t>
+            </a:r>
+          </a:p>
+        </p:txBody>
+      </p:sp>
+    </p:spTree>
+  </p:cSld>
+  <p:clrMapOvr>
+    <a:masterClrMapping/>
+  </p:clrMapOvr>
+</p:sld>
+</file>
+
+<file path=ppt/slides/slide11.xml><?xml version="1.0" encoding="utf-8"?>
+<p:sld xmlns:a="http://schemas.openxmlformats.org/drawingml/2006/main" xmlns:p="http://schemas.openxmlformats.org/presentationml/2006/main" xmlns:r="http://schemas.openxmlformats.org/officeDocument/2006/relationships">
+  <p:cSld name="Актуальность">
+    <p:spTree>
+      <p:nvGrpSpPr>
+        <p:cNvPr id="1" name=""/>
+        <p:cNvGrpSpPr/>
+        <p:nvPr/>
+      </p:nvGrpSpPr>
+      <p:grpSpPr/>
+      <p:sp>
+        <p:nvSpPr>
+          <p:cNvPr id="2" name="Title 1"/>
+          <p:cNvSpPr>
+            <a:spLocks noGrp="1"/>
+          </p:cNvSpPr>
+          <p:nvPr>
+            <p:ph type="title"/>
+          </p:nvPr>
+        </p:nvSpPr>
+        <p:spPr/>
+        <p:txBody>
+          <a:bodyPr/>
+          <a:lstStyle/>
+          <a:p/>
         </p:txBody>
       </p:sp>
       <p:sp>
@@ -3193,27 +3232,17 @@
           <a:bodyPr/>
           <a:lstStyle/>
           <a:p>
-            <a:pPr>
-              <a:defRPr sz="2000"/>
-            </a:pPr>
-            <a:r>
-              <a:t>Реализован графовый backend и настольный клиент</a:t>
-            </a:r>
-          </a:p>
-          <a:p>
-            <a:pPr>
-              <a:defRPr sz="2000"/>
-            </a:pPr>
-            <a:r>
-              <a:t>CRUD и импорт/экспорт покрывают учебные сценарии</a:t>
-            </a:r>
-          </a:p>
-          <a:p>
-            <a:pPr>
-              <a:defRPr sz="2000"/>
-            </a:pPr>
-            <a:r>
-              <a:t>Пример pip показывает практический смысл степеней вершин</a:t>
+            <a:r>
+              <a:rPr/>
+              <a:t>Часто данные из различных предметных областей можно представить в виде графа. В зависимости от структуры данных, граф может быть разных типов, но принцип один и тот же.</a:t>
+            </a:r>
+            <a:r>
+              <a:rPr/>
+              <a:t>Графовые базы данных, основой которых и является граф — удобное представление подобных данных в компьютере.</a:t>
+            </a:r>
+            <a:r>
+              <a:rPr/>
+              <a:t>Представленный программный комплекс позволит не только работать с уже существующими графовыми БД, но и создавать новые.</a:t>
             </a:r>
           </a:p>
         </p:txBody>
@@ -3252,7 +3281,8 @@
           <a:lstStyle/>
           <a:p>
             <a:r>
-              <a:t>Задача</a:t>
+              <a:rPr/>
+              <a:t>Постановка задачи</a:t>
             </a:r>
           </a:p>
         </p:txBody>
@@ -3276,23 +3306,12 @@
               <a:defRPr sz="2000"/>
             </a:pPr>
             <a:r>
-              <a:t>Предметные данные часто — сеть связей, а не одна таблица</a:t>
-            </a:r>
-          </a:p>
-          <a:p>
-            <a:pPr>
-              <a:defRPr sz="2000"/>
-            </a:pPr>
-            <a:r>
-              <a:t>Нужен инструмент: хранить граф и выполнять базовые операции</a:t>
-            </a:r>
-          </a:p>
-          <a:p>
-            <a:pPr>
-              <a:defRPr sz="2000"/>
-            </a:pPr>
-            <a:r>
-              <a:t>Показать связь с теорией графов на понятном примере</a:t>
+              <a:rPr/>
+              <a:t>Пусть имеются некоторые предметные данные, представимые в виде графа.</a:t>
+            </a:r>
+            <a:r>
+              <a:rPr/>
+              <a:t>Задача: располагая всеми необходимыми данными для построения графа, обеспечить программную среду для реализации этой возможности, а также дополнительных возможностей (изменение, удаление, отображение).</a:t>
             </a:r>
           </a:p>
         </p:txBody>
@@ -3331,7 +3350,8 @@
           <a:lstStyle/>
           <a:p>
             <a:r>
-              <a:t>Граф G = (V, E)</a:t>
+              <a:rPr/>
+              <a:t>Возможное решение</a:t>
             </a:r>
           </a:p>
         </p:txBody>
@@ -3355,23 +3375,16 @@
               <a:defRPr sz="2000"/>
             </a:pPr>
             <a:r>
-              <a:t>V — вершины (объекты): метки и свойства</a:t>
-            </a:r>
-          </a:p>
-          <a:p>
-            <a:pPr>
-              <a:defRPr sz="2000"/>
-            </a:pPr>
-            <a:r>
-              <a:t>E — связи (дуги): тип, направление, свойства</a:t>
-            </a:r>
-          </a:p>
-          <a:p>
-            <a:pPr>
-              <a:defRPr sz="2000"/>
-            </a:pPr>
-            <a:r>
-              <a:t>Пример: deg⁻(v) — сколько дуг входит в v (востребованность)</a:t>
+              <a:rPr/>
+              <a:t>Программный комплекс, включающий: движок (Хранение графа) — здесь выбран Neo4j,</a:t>
+            </a:r>
+            <a:r>
+              <a:rPr/>
+              <a:t>логика работы с сервером и пользовательскими запросами (backend-часть) — REST API (FastAPI),</a:t>
+            </a:r>
+            <a:r>
+              <a:rPr/>
+              <a:t>клиент на wxPython с поддержкой доступности для программ экранного доступа.</a:t>
             </a:r>
           </a:p>
         </p:txBody>
@@ -3410,7 +3423,8 @@
           <a:lstStyle/>
           <a:p>
             <a:r>
-              <a:t>Операции CRUD</a:t>
+              <a:rPr/>
+              <a:t>Основные возможности программы</a:t>
             </a:r>
           </a:p>
         </p:txBody>
@@ -3434,31 +3448,28 @@
               <a:defRPr sz="2000"/>
             </a:pPr>
             <a:r>
-              <a:t>Create — новая вершина или связь</a:t>
-            </a:r>
-          </a:p>
-          <a:p>
-            <a:pPr>
-              <a:defRPr sz="2000"/>
-            </a:pPr>
-            <a:r>
-              <a:t>Read — списки и просмотр свойств</a:t>
-            </a:r>
-          </a:p>
-          <a:p>
-            <a:pPr>
-              <a:defRPr sz="2000"/>
-            </a:pPr>
-            <a:r>
-              <a:t>Update — изменение свойств</a:t>
-            </a:r>
-          </a:p>
-          <a:p>
-            <a:pPr>
-              <a:defRPr sz="2000"/>
-            </a:pPr>
-            <a:r>
-              <a:t>Delete — удаление связи или вершины (с опцией detach)</a:t>
+              <a:rPr/>
+              <a:t>Базовые операции CRUD:</a:t>
+            </a:r>
+            <a:r>
+              <a:rPr/>
+              <a:t>Create (создание) — создание новой вершины или связи (ребра),</a:t>
+            </a:r>
+            <a:r>
+              <a:rPr/>
+              <a:t>Read (чтение) — списки и просмотр свойств,</a:t>
+            </a:r>
+            <a:r>
+              <a:rPr/>
+              <a:t>Update (обновление) — изменение уже существующих свойств,</a:t>
+            </a:r>
+            <a:r>
+              <a:rPr/>
+              <a:t>Delete — удаление связи или вершины (с опцией удаления всех относящихся к ней связей).</a:t>
+            </a:r>
+            <a:r>
+              <a:rPr/>
+              <a:t/>
             </a:r>
           </a:p>
         </p:txBody>
@@ -3497,7 +3508,12 @@
           <a:lstStyle/>
           <a:p>
             <a:r>
-              <a:t>Архитектура</a:t>
+              <a:rPr/>
+              <a:t>Основные возможности</a:t>
+            </a:r>
+            <a:r>
+              <a:rPr/>
+              <a:t/>
             </a:r>
           </a:p>
         </p:txBody>
@@ -3521,31 +3537,32 @@
               <a:defRPr sz="2000"/>
             </a:pPr>
             <a:r>
-              <a:t>Neo4j — хранение графа</a:t>
-            </a:r>
-          </a:p>
-          <a:p>
-            <a:pPr>
-              <a:defRPr sz="2000"/>
-            </a:pPr>
-            <a:r>
-              <a:t>REST API (FastAPI) — единая точка доступа</a:t>
-            </a:r>
-          </a:p>
-          <a:p>
-            <a:pPr>
-              <a:defRPr sz="2000"/>
-            </a:pPr>
-            <a:r>
-              <a:t>Клиент wxPython — таблицы, диалоги, импорт/экспорт</a:t>
-            </a:r>
-          </a:p>
-          <a:p>
-            <a:pPr>
-              <a:defRPr sz="2000"/>
-            </a:pPr>
-            <a:r>
-              <a:t>Docker Compose — запуск сервера в учебной среде</a:t>
+              <a:rPr/>
+              <a:t>Приложение (клиент с графическим интерфейсом).</a:t>
+            </a:r>
+            <a:r>
+              <a:rPr/>
+              <a:t>Наглядное представление вершин и связей в таблицах;</a:t>
+            </a:r>
+            <a:r>
+              <a:rPr/>
+              <a:t>Выполнение CRUD-операций с помощью соответствующих им кнопок;</a:t>
+            </a:r>
+            <a:r>
+              <a:rPr/>
+              <a:t>Управление базами Neo4j на сервере;</a:t>
+            </a:r>
+            <a:r>
+              <a:rPr/>
+              <a:t>Импорт и экспорт существующих БД в нескольких стандартах;</a:t>
+            </a:r>
+            <a:r>
+              <a:rPr/>
+              <a:t>Визуализация графа (обычная или отдельное окно на весь экран);</a:t>
+            </a:r>
+            <a:r>
+              <a:rPr/>
+              <a:t>Доступность для скринридеров (кроме визуализации).</a:t>
             </a:r>
           </a:p>
         </p:txBody>
@@ -3584,7 +3601,8 @@
           <a:lstStyle/>
           <a:p>
             <a:r>
-              <a:t>Клиент: основные возможности</a:t>
+              <a:rPr/>
+              <a:t>Поддерживаемые стандарты записи графов</a:t>
             </a:r>
           </a:p>
         </p:txBody>
@@ -3608,31 +3626,12 @@
               <a:defRPr sz="2000"/>
             </a:pPr>
             <a:r>
-              <a:t>Вершины и связи в таблицах, CRUD-кнопки</a:t>
-            </a:r>
-          </a:p>
-          <a:p>
-            <a:pPr>
-              <a:defRPr sz="2000"/>
-            </a:pPr>
-            <a:r>
-              <a:t>Управление базами Neo4j на сервере</a:t>
-            </a:r>
-          </a:p>
-          <a:p>
-            <a:pPr>
-              <a:defRPr sz="2000"/>
-            </a:pPr>
-            <a:r>
-              <a:t>Импорт JSON / GraphML, экспорт JSON / GraphML / GEXF</a:t>
-            </a:r>
-          </a:p>
-          <a:p>
-            <a:pPr>
-              <a:defRPr sz="2000"/>
-            </a:pPr>
-            <a:r>
-              <a:t>Окно визуализации (обычное или на весь экран)</a:t>
+              <a:rPr/>
+              <a:t>В качестве основного формата проекта выбран JSON.</a:t>
+            </a:r>
+            <a:r>
+              <a:rPr/>
+              <a:t>Также, реализована поддержка GraphML и GEXF для совместимости с другими движками и универсальности.</a:t>
             </a:r>
           </a:p>
         </p:txBody>
@@ -3671,7 +3670,12 @@
           <a:lstStyle/>
           <a:p>
             <a:r>
-              <a:t>Пример: зависимости pip</a:t>
+              <a:rPr/>
+              <a:t>Пример: граф зависимостей модулей и пакетов, установленных с использованием pip.</a:t>
+            </a:r>
+            <a:r>
+              <a:rPr/>
+              <a:t/>
             </a:r>
           </a:p>
         </p:txBody>
@@ -3695,31 +3699,24 @@
               <a:defRPr sz="2000"/>
             </a:pPr>
             <a:r>
-              <a:t>Файл pip_dependency_graph.json</a:t>
-            </a:r>
-          </a:p>
-          <a:p>
-            <a:pPr>
-              <a:defRPr sz="2000"/>
-            </a:pPr>
-            <a:r>
-              <a:t>Вершина = пакет, дуга REQUIRES = зависимость</a:t>
-            </a:r>
-          </a:p>
-          <a:p>
-            <a:pPr>
-              <a:defRPr sz="2000"/>
-            </a:pPr>
-            <a:r>
-              <a:t>Анализ: у кого больше всего входящих связей</a:t>
-            </a:r>
-          </a:p>
-          <a:p>
-            <a:pPr>
-              <a:defRPr sz="2000"/>
-            </a:pPr>
-            <a:r>
-              <a:t>Импорт одной командой или через меню клиента</a:t>
+              <a:rPr/>
+              <a:t>Файл pip_dependency_graph.json.</a:t>
+            </a:r>
+            <a:r>
+              <a:rPr/>
+              <a:t>Структура: вершина — пакет или модуль.</a:t>
+            </a:r>
+            <a:r>
+              <a:rPr/>
+              <a:t>Ребро (связь) — признак "requires" (требуется для установки).</a:t>
+            </a:r>
+            <a:r>
+              <a:rPr/>
+              <a:t>В данном случае наличие этой связи показывает, что модуль a необходим для установки модуля b.</a:t>
+            </a:r>
+            <a:r>
+              <a:rPr/>
+              <a:t>Анализ: самые необходимые модули (те, что чаще всего требуются для установки других), модули, зависящие от наибольшего количества других модулей и т.д.</a:t>
             </a:r>
           </a:p>
         </p:txBody>
@@ -3758,7 +3755,8 @@
           <a:lstStyle/>
           <a:p>
             <a:r>
-              <a:t>Обмен данными</a:t>
+              <a:rPr/>
+              <a:t>Дальнейшее развитие</a:t>
             </a:r>
           </a:p>
         </p:txBody>
@@ -3782,23 +3780,12 @@
               <a:defRPr sz="2000"/>
             </a:pPr>
             <a:r>
-              <a:t>JSON — основной формат проекта</a:t>
-            </a:r>
-          </a:p>
-          <a:p>
-            <a:pPr>
-              <a:defRPr sz="2000"/>
-            </a:pPr>
-            <a:r>
-              <a:t>GraphML, GEXF — для Gephi и др.</a:t>
-            </a:r>
-          </a:p>
-          <a:p>
-            <a:pPr>
-              <a:defRPr sz="2000"/>
-            </a:pPr>
-            <a:r>
-              <a:t>Диалог после импорта: число вершин и рёбер</a:t>
+              <a:rPr/>
+              <a:t>Реализация алгоритмов поиска (обход соседей, кратчайший путь и др.).</a:t>
+            </a:r>
+            <a:r>
+              <a:rPr/>
+              <a:t>Разработка веб-интерфейса как замена нынешнего клиента с целью увеличения количества поддерживаемых платформ.</a:t>
             </a:r>
           </a:p>
         </p:txBody>
@@ -3837,7 +3824,8 @@
           <a:lstStyle/>
           <a:p>
             <a:r>
-              <a:t>Дальнейшее развитие</a:t>
+              <a:rPr/>
+              <a:t>Итоги</a:t>
             </a:r>
           </a:p>
         </p:txBody>
@@ -3861,23 +3849,12 @@
               <a:defRPr sz="2000"/>
             </a:pPr>
             <a:r>
-              <a:t>Поиск по графу (соседи, пути) — следующий этап</a:t>
-            </a:r>
-          </a:p>
-          <a:p>
-            <a:pPr>
-              <a:defRPr sz="2000"/>
-            </a:pPr>
-            <a:r>
-              <a:t>Веб-интерфейс, роли пользователей</a:t>
-            </a:r>
-          </a:p>
-          <a:p>
-            <a:pPr>
-              <a:defRPr sz="2000"/>
-            </a:pPr>
-            <a:r>
-              <a:t>Сейчас: фундамент CRUD + наглядный пример</a:t>
+              <a:rPr/>
+              <a:t>Предложено решение задачи.</a:t>
+            </a:r>
+            <a:r>
+              <a:rPr/>
+              <a:t>Реализован программный комплекс (движок + приложение). Движок — хранение графов и обработка пользовательских запросов, приложение — более удобная работа с БД, демонстрация возможностей движка.</a:t>
             </a:r>
           </a:p>
         </p:txBody>

--- a/docs/презентация.pptx
+++ b/docs/презентация.pptx
@@ -3177,7 +3177,36 @@
           <a:p>
             <a:r>
               <a:rPr/>
-              <a:t>Спасибо за внимание!</a:t>
+              <a:t>Итоги</a:t>
+            </a:r>
+          </a:p>
+        </p:txBody>
+      </p:sp>
+      <p:sp>
+        <p:nvSpPr>
+          <p:cNvPr id="3" name="Content Placeholder 2"/>
+          <p:cNvSpPr>
+            <a:spLocks noGrp="1"/>
+          </p:cNvSpPr>
+          <p:nvPr>
+            <p:ph idx="1"/>
+          </p:nvPr>
+        </p:nvSpPr>
+        <p:spPr/>
+        <p:txBody>
+          <a:bodyPr/>
+          <a:lstStyle/>
+          <a:p>
+            <a:pPr>
+              <a:defRPr sz="2000"/>
+            </a:pPr>
+            <a:r>
+              <a:rPr/>
+              <a:t>Предложено решение задачи.</a:t>
+            </a:r>
+            <a:r>
+              <a:rPr/>
+              <a:t>Реализован программный комплекс (движок + приложение). Движок — хранение графов и обработка пользовательских запросов, приложение — более удобная работа с БД, демонстрация возможностей движка.</a:t>
             </a:r>
           </a:p>
         </p:txBody>
@@ -3192,7 +3221,7 @@
 
 <file path=ppt/slides/slide11.xml><?xml version="1.0" encoding="utf-8"?>
 <p:sld xmlns:a="http://schemas.openxmlformats.org/drawingml/2006/main" xmlns:p="http://schemas.openxmlformats.org/presentationml/2006/main" xmlns:r="http://schemas.openxmlformats.org/officeDocument/2006/relationships">
-  <p:cSld name="Актуальность">
+  <p:cSld>
     <p:spTree>
       <p:nvGrpSpPr>
         <p:cNvPr id="1" name=""/>
@@ -3214,35 +3243,10 @@
         <p:txBody>
           <a:bodyPr/>
           <a:lstStyle/>
-          <a:p/>
-        </p:txBody>
-      </p:sp>
-      <p:sp>
-        <p:nvSpPr>
-          <p:cNvPr id="3" name="Content Placeholder 2"/>
-          <p:cNvSpPr>
-            <a:spLocks noGrp="1"/>
-          </p:cNvSpPr>
-          <p:nvPr>
-            <p:ph idx="1"/>
-          </p:nvPr>
-        </p:nvSpPr>
-        <p:spPr/>
-        <p:txBody>
-          <a:bodyPr/>
-          <a:lstStyle/>
-          <a:p>
-            <a:r>
-              <a:rPr/>
-              <a:t>Часто данные из различных предметных областей можно представить в виде графа. В зависимости от структуры данных, граф может быть разных типов, но принцип один и тот же.</a:t>
-            </a:r>
-            <a:r>
-              <a:rPr/>
-              <a:t>Графовые базы данных, основой которых и является граф — удобное представление подобных данных в компьютере.</a:t>
-            </a:r>
-            <a:r>
-              <a:rPr/>
-              <a:t>Представленный программный комплекс позволит не только работать с уже существующими графовыми БД, но и создавать новые.</a:t>
+          <a:p>
+            <a:r>
+              <a:rPr/>
+              <a:t>Спасибо за внимание!</a:t>
             </a:r>
           </a:p>
         </p:txBody>
@@ -3257,7 +3261,7 @@
 
 <file path=ppt/slides/slide2.xml><?xml version="1.0" encoding="utf-8"?>
 <p:sld xmlns:a="http://schemas.openxmlformats.org/drawingml/2006/main" xmlns:p="http://schemas.openxmlformats.org/presentationml/2006/main" xmlns:r="http://schemas.openxmlformats.org/officeDocument/2006/relationships">
-  <p:cSld>
+  <p:cSld name="Актуальность">
     <p:spTree>
       <p:nvGrpSpPr>
         <p:cNvPr id="1" name=""/>
@@ -3279,12 +3283,7 @@
         <p:txBody>
           <a:bodyPr/>
           <a:lstStyle/>
-          <a:p>
-            <a:r>
-              <a:rPr/>
-              <a:t>Постановка задачи</a:t>
-            </a:r>
-          </a:p>
+          <a:p/>
         </p:txBody>
       </p:sp>
       <p:sp>
@@ -3297,25 +3296,55 @@
             <p:ph idx="1"/>
           </p:nvPr>
         </p:nvSpPr>
-        <p:spPr/>
-        <p:txBody>
-          <a:bodyPr/>
-          <a:lstStyle/>
-          <a:p>
-            <a:pPr>
-              <a:defRPr sz="2000"/>
-            </a:pPr>
-            <a:r>
-              <a:rPr/>
-              <a:t>Пусть имеются некоторые предметные данные, представимые в виде графа.</a:t>
-            </a:r>
-            <a:r>
-              <a:rPr/>
-              <a:t>Задача: располагая всеми необходимыми данными для построения графа, обеспечить программную среду для реализации этой возможности, а также дополнительных возможностей (изменение, удаление, отображение).</a:t>
-            </a:r>
-          </a:p>
-        </p:txBody>
-      </p:sp>
+        <p:spPr>
+          <a:xfrm>
+            <a:off x="365760" y="1143000"/>
+            <a:ext cx="4434840" cy="5394960"/>
+          </a:xfrm>
+        </p:spPr>
+        <p:txBody>
+          <a:bodyPr/>
+          <a:lstStyle/>
+          <a:p>
+            <a:r>
+              <a:rPr/>
+              <a:t>Часто данные из различных предметных областей можно представить в виде графа. В зависимости от структуры данных, граф может быть разных типов, но принцип один и тот же.</a:t>
+            </a:r>
+            <a:r>
+              <a:rPr/>
+              <a:t>Графовые базы данных, основой которых и является граф — удобное представление подобных данных в компьютере.</a:t>
+            </a:r>
+            <a:r>
+              <a:rPr/>
+              <a:t>Представленный программный комплекс позволит не только работать с уже существующими графовыми БД, но и создавать новые.</a:t>
+            </a:r>
+          </a:p>
+        </p:txBody>
+      </p:sp>
+      <p:pic>
+        <p:nvPicPr>
+          <p:cNvPr id="4" name="Picture 3" descr="fig1_graph.png"/>
+          <p:cNvPicPr>
+            <a:picLocks noChangeAspect="1"/>
+          </p:cNvPicPr>
+          <p:nvPr/>
+        </p:nvPicPr>
+        <p:blipFill>
+          <a:blip r:embed="rId2"/>
+          <a:stretch>
+            <a:fillRect/>
+          </a:stretch>
+        </p:blipFill>
+        <p:spPr>
+          <a:xfrm>
+            <a:off x="4617720" y="2552899"/>
+            <a:ext cx="4160520" cy="2483721"/>
+          </a:xfrm>
+          <a:prstGeom prst="rect">
+            <a:avLst/>
+          </a:prstGeom>
+        </p:spPr>
+      </p:pic>
     </p:spTree>
   </p:cSld>
   <p:clrMapOvr>
@@ -3351,7 +3380,7 @@
           <a:p>
             <a:r>
               <a:rPr/>
-              <a:t>Возможное решение</a:t>
+              <a:t>Постановка задачи</a:t>
             </a:r>
           </a:p>
         </p:txBody>
@@ -3376,15 +3405,11 @@
             </a:pPr>
             <a:r>
               <a:rPr/>
-              <a:t>Программный комплекс, включающий: движок (Хранение графа) — здесь выбран Neo4j,</a:t>
-            </a:r>
-            <a:r>
-              <a:rPr/>
-              <a:t>логика работы с сервером и пользовательскими запросами (backend-часть) — REST API (FastAPI),</a:t>
-            </a:r>
-            <a:r>
-              <a:rPr/>
-              <a:t>клиент на wxPython с поддержкой доступности для программ экранного доступа.</a:t>
+              <a:t>Пусть имеются некоторые предметные данные, представимые в виде графа.</a:t>
+            </a:r>
+            <a:r>
+              <a:rPr/>
+              <a:t>Задача: располагая всеми необходимыми данными для построения графа, обеспечить программную среду для реализации этой возможности, а также дополнительных возможностей (изменение, удаление, отображение).</a:t>
             </a:r>
           </a:p>
         </p:txBody>
@@ -3424,7 +3449,7 @@
           <a:p>
             <a:r>
               <a:rPr/>
-              <a:t>Основные возможности программы</a:t>
+              <a:t>Возможное решение</a:t>
             </a:r>
           </a:p>
         </p:txBody>
@@ -3439,7 +3464,12 @@
             <p:ph idx="1"/>
           </p:nvPr>
         </p:nvSpPr>
-        <p:spPr/>
+        <p:spPr>
+          <a:xfrm>
+            <a:off x="365760" y="1143000"/>
+            <a:ext cx="4434840" cy="5394960"/>
+          </a:xfrm>
+        </p:spPr>
         <p:txBody>
           <a:bodyPr/>
           <a:lstStyle/>
@@ -3449,31 +3479,43 @@
             </a:pPr>
             <a:r>
               <a:rPr/>
-              <a:t>Базовые операции CRUD:</a:t>
-            </a:r>
-            <a:r>
-              <a:rPr/>
-              <a:t>Create (создание) — создание новой вершины или связи (ребра),</a:t>
-            </a:r>
-            <a:r>
-              <a:rPr/>
-              <a:t>Read (чтение) — списки и просмотр свойств,</a:t>
-            </a:r>
-            <a:r>
-              <a:rPr/>
-              <a:t>Update (обновление) — изменение уже существующих свойств,</a:t>
-            </a:r>
-            <a:r>
-              <a:rPr/>
-              <a:t>Delete — удаление связи или вершины (с опцией удаления всех относящихся к ней связей).</a:t>
-            </a:r>
-            <a:r>
-              <a:rPr/>
-              <a:t/>
-            </a:r>
-          </a:p>
-        </p:txBody>
-      </p:sp>
+              <a:t>Программный комплекс, включающий: движок (Хранение графа) — здесь выбран Neo4j,</a:t>
+            </a:r>
+            <a:r>
+              <a:rPr/>
+              <a:t>логика работы с сервером и пользовательскими запросами (backend-часть) — REST API (FastAPI),</a:t>
+            </a:r>
+            <a:r>
+              <a:rPr/>
+              <a:t>клиент на wxPython с поддержкой доступности для программ экранного доступа.</a:t>
+            </a:r>
+          </a:p>
+        </p:txBody>
+      </p:sp>
+      <p:pic>
+        <p:nvPicPr>
+          <p:cNvPr id="4" name="Picture 3" descr="fig2_architecture.png"/>
+          <p:cNvPicPr>
+            <a:picLocks noChangeAspect="1"/>
+          </p:cNvPicPr>
+          <p:nvPr/>
+        </p:nvPicPr>
+        <p:blipFill>
+          <a:blip r:embed="rId2"/>
+          <a:stretch>
+            <a:fillRect/>
+          </a:stretch>
+        </p:blipFill>
+        <p:spPr>
+          <a:xfrm>
+            <a:off x="4617720" y="2810153"/>
+            <a:ext cx="4160520" cy="1969214"/>
+          </a:xfrm>
+          <a:prstGeom prst="rect">
+            <a:avLst/>
+          </a:prstGeom>
+        </p:spPr>
+      </p:pic>
     </p:spTree>
   </p:cSld>
   <p:clrMapOvr>
@@ -3509,11 +3551,7 @@
           <a:p>
             <a:r>
               <a:rPr/>
-              <a:t>Основные возможности</a:t>
-            </a:r>
-            <a:r>
-              <a:rPr/>
-              <a:t/>
+              <a:t>Основные возможности программы</a:t>
             </a:r>
           </a:p>
         </p:txBody>
@@ -3528,7 +3566,12 @@
             <p:ph idx="1"/>
           </p:nvPr>
         </p:nvSpPr>
-        <p:spPr/>
+        <p:spPr>
+          <a:xfrm>
+            <a:off x="365760" y="1143000"/>
+            <a:ext cx="4434840" cy="5394960"/>
+          </a:xfrm>
+        </p:spPr>
         <p:txBody>
           <a:bodyPr/>
           <a:lstStyle/>
@@ -3538,35 +3581,55 @@
             </a:pPr>
             <a:r>
               <a:rPr/>
-              <a:t>Приложение (клиент с графическим интерфейсом).</a:t>
-            </a:r>
-            <a:r>
-              <a:rPr/>
-              <a:t>Наглядное представление вершин и связей в таблицах;</a:t>
-            </a:r>
-            <a:r>
-              <a:rPr/>
-              <a:t>Выполнение CRUD-операций с помощью соответствующих им кнопок;</a:t>
-            </a:r>
-            <a:r>
-              <a:rPr/>
-              <a:t>Управление базами Neo4j на сервере;</a:t>
-            </a:r>
-            <a:r>
-              <a:rPr/>
-              <a:t>Импорт и экспорт существующих БД в нескольких стандартах;</a:t>
-            </a:r>
-            <a:r>
-              <a:rPr/>
-              <a:t>Визуализация графа (обычная или отдельное окно на весь экран);</a:t>
-            </a:r>
-            <a:r>
-              <a:rPr/>
-              <a:t>Доступность для скринридеров (кроме визуализации).</a:t>
-            </a:r>
-          </a:p>
-        </p:txBody>
-      </p:sp>
+              <a:t>Базовые операции CRUD:</a:t>
+            </a:r>
+            <a:r>
+              <a:rPr/>
+              <a:t>Create (создание) — создание новой вершины или связи (ребра),</a:t>
+            </a:r>
+            <a:r>
+              <a:rPr/>
+              <a:t>Read (чтение) — списки и просмотр свойств,</a:t>
+            </a:r>
+            <a:r>
+              <a:rPr/>
+              <a:t>Update (обновление) — изменение уже существующих свойств,</a:t>
+            </a:r>
+            <a:r>
+              <a:rPr/>
+              <a:t>Delete — удаление связи или вершины (с опцией удаления всех относящихся к ней связей).</a:t>
+            </a:r>
+            <a:r>
+              <a:rPr/>
+              <a:t/>
+            </a:r>
+          </a:p>
+        </p:txBody>
+      </p:sp>
+      <p:pic>
+        <p:nvPicPr>
+          <p:cNvPr id="4" name="Picture 3" descr="fig3_crud_flow.png"/>
+          <p:cNvPicPr>
+            <a:picLocks noChangeAspect="1"/>
+          </p:cNvPicPr>
+          <p:nvPr/>
+        </p:nvPicPr>
+        <p:blipFill>
+          <a:blip r:embed="rId2"/>
+          <a:stretch>
+            <a:fillRect/>
+          </a:stretch>
+        </p:blipFill>
+        <p:spPr>
+          <a:xfrm>
+            <a:off x="4617720" y="2797769"/>
+            <a:ext cx="4160519" cy="1993981"/>
+          </a:xfrm>
+          <a:prstGeom prst="rect">
+            <a:avLst/>
+          </a:prstGeom>
+        </p:spPr>
+      </p:pic>
     </p:spTree>
   </p:cSld>
   <p:clrMapOvr>
@@ -3602,7 +3665,11 @@
           <a:p>
             <a:r>
               <a:rPr/>
-              <a:t>Поддерживаемые стандарты записи графов</a:t>
+              <a:t>Основные возможности</a:t>
+            </a:r>
+            <a:r>
+              <a:rPr/>
+              <a:t/>
             </a:r>
           </a:p>
         </p:txBody>
@@ -3617,7 +3684,12 @@
             <p:ph idx="1"/>
           </p:nvPr>
         </p:nvSpPr>
-        <p:spPr/>
+        <p:spPr>
+          <a:xfrm>
+            <a:off x="365760" y="1143000"/>
+            <a:ext cx="4343400" cy="5394960"/>
+          </a:xfrm>
+        </p:spPr>
         <p:txBody>
           <a:bodyPr/>
           <a:lstStyle/>
@@ -3627,15 +3699,59 @@
             </a:pPr>
             <a:r>
               <a:rPr/>
-              <a:t>В качестве основного формата проекта выбран JSON.</a:t>
-            </a:r>
-            <a:r>
-              <a:rPr/>
-              <a:t>Также, реализована поддержка GraphML и GEXF для совместимости с другими движками и универсальности.</a:t>
-            </a:r>
-          </a:p>
-        </p:txBody>
-      </p:sp>
+              <a:t>Приложение (клиент с графическим интерфейсом).</a:t>
+            </a:r>
+            <a:r>
+              <a:rPr/>
+              <a:t>Наглядное представление вершин и связей в таблицах;</a:t>
+            </a:r>
+            <a:r>
+              <a:rPr/>
+              <a:t>Выполнение CRUD-операций с помощью соответствующих им кнопок;</a:t>
+            </a:r>
+            <a:r>
+              <a:rPr/>
+              <a:t>Управление базами Neo4j на сервере;</a:t>
+            </a:r>
+            <a:r>
+              <a:rPr/>
+              <a:t>Импорт и экспорт существующих БД в нескольких стандартах;</a:t>
+            </a:r>
+            <a:r>
+              <a:rPr/>
+              <a:t>Визуализация графа (обычная или отдельное окно на весь экран);</a:t>
+            </a:r>
+            <a:r>
+              <a:rPr/>
+              <a:t>Доступность для скринридеров (кроме визуализации).</a:t>
+            </a:r>
+          </a:p>
+        </p:txBody>
+      </p:sp>
+      <p:pic>
+        <p:nvPicPr>
+          <p:cNvPr id="4" name="Picture 3" descr="main_window.png"/>
+          <p:cNvPicPr>
+            <a:picLocks noChangeAspect="1"/>
+          </p:cNvPicPr>
+          <p:nvPr/>
+        </p:nvPicPr>
+        <p:blipFill>
+          <a:blip r:embed="rId2"/>
+          <a:stretch>
+            <a:fillRect/>
+          </a:stretch>
+        </p:blipFill>
+        <p:spPr>
+          <a:xfrm>
+            <a:off x="4617720" y="1357284"/>
+            <a:ext cx="4160520" cy="4874952"/>
+          </a:xfrm>
+          <a:prstGeom prst="rect">
+            <a:avLst/>
+          </a:prstGeom>
+        </p:spPr>
+      </p:pic>
     </p:spTree>
   </p:cSld>
   <p:clrMapOvr>
@@ -3671,11 +3787,7 @@
           <a:p>
             <a:r>
               <a:rPr/>
-              <a:t>Пример: граф зависимостей модулей и пакетов, установленных с использованием pip.</a:t>
-            </a:r>
-            <a:r>
-              <a:rPr/>
-              <a:t/>
+              <a:t>Поддерживаемые стандарты записи графов</a:t>
             </a:r>
           </a:p>
         </p:txBody>
@@ -3690,7 +3802,12 @@
             <p:ph idx="1"/>
           </p:nvPr>
         </p:nvSpPr>
-        <p:spPr/>
+        <p:spPr>
+          <a:xfrm>
+            <a:off x="365760" y="1143000"/>
+            <a:ext cx="4343400" cy="5394960"/>
+          </a:xfrm>
+        </p:spPr>
         <p:txBody>
           <a:bodyPr/>
           <a:lstStyle/>
@@ -3700,27 +3817,39 @@
             </a:pPr>
             <a:r>
               <a:rPr/>
-              <a:t>Файл pip_dependency_graph.json.</a:t>
-            </a:r>
-            <a:r>
-              <a:rPr/>
-              <a:t>Структура: вершина — пакет или модуль.</a:t>
-            </a:r>
-            <a:r>
-              <a:rPr/>
-              <a:t>Ребро (связь) — признак "requires" (требуется для установки).</a:t>
-            </a:r>
-            <a:r>
-              <a:rPr/>
-              <a:t>В данном случае наличие этой связи показывает, что модуль a необходим для установки модуля b.</a:t>
-            </a:r>
-            <a:r>
-              <a:rPr/>
-              <a:t>Анализ: самые необходимые модули (те, что чаще всего требуются для установки других), модули, зависящие от наибольшего количества других модулей и т.д.</a:t>
-            </a:r>
-          </a:p>
-        </p:txBody>
-      </p:sp>
+              <a:t>В качестве основного формата проекта выбран JSON.</a:t>
+            </a:r>
+            <a:r>
+              <a:rPr/>
+              <a:t>Также, реализована поддержка GraphML и GEXF для совместимости с другими движками и универсальности.</a:t>
+            </a:r>
+          </a:p>
+        </p:txBody>
+      </p:sp>
+      <p:pic>
+        <p:nvPicPr>
+          <p:cNvPr id="4" name="Picture 3" descr="edit_vertex.png"/>
+          <p:cNvPicPr>
+            <a:picLocks noChangeAspect="1"/>
+          </p:cNvPicPr>
+          <p:nvPr/>
+        </p:nvPicPr>
+        <p:blipFill>
+          <a:blip r:embed="rId2"/>
+          <a:stretch>
+            <a:fillRect/>
+          </a:stretch>
+        </p:blipFill>
+        <p:spPr>
+          <a:xfrm>
+            <a:off x="4617720" y="1970109"/>
+            <a:ext cx="4160520" cy="3649302"/>
+          </a:xfrm>
+          <a:prstGeom prst="rect">
+            <a:avLst/>
+          </a:prstGeom>
+        </p:spPr>
+      </p:pic>
     </p:spTree>
   </p:cSld>
   <p:clrMapOvr>
@@ -3756,7 +3885,11 @@
           <a:p>
             <a:r>
               <a:rPr/>
-              <a:t>Дальнейшее развитие</a:t>
+              <a:t>Пример: граф зависимостей модулей и пакетов, установленных с использованием pip.</a:t>
+            </a:r>
+            <a:r>
+              <a:rPr/>
+              <a:t/>
             </a:r>
           </a:p>
         </p:txBody>
@@ -3771,7 +3904,12 @@
             <p:ph idx="1"/>
           </p:nvPr>
         </p:nvSpPr>
-        <p:spPr/>
+        <p:spPr>
+          <a:xfrm>
+            <a:off x="365760" y="1143000"/>
+            <a:ext cx="4206240" cy="5394960"/>
+          </a:xfrm>
+        </p:spPr>
         <p:txBody>
           <a:bodyPr/>
           <a:lstStyle/>
@@ -3781,15 +3919,51 @@
             </a:pPr>
             <a:r>
               <a:rPr/>
-              <a:t>Реализация алгоритмов поиска (обход соседей, кратчайший путь и др.).</a:t>
-            </a:r>
-            <a:r>
-              <a:rPr/>
-              <a:t>Разработка веб-интерфейса как замена нынешнего клиента с целью увеличения количества поддерживаемых платформ.</a:t>
-            </a:r>
-          </a:p>
-        </p:txBody>
-      </p:sp>
+              <a:t>Файл pip_dependency_graph.json.</a:t>
+            </a:r>
+            <a:r>
+              <a:rPr/>
+              <a:t>Структура: вершина — пакет или модуль.</a:t>
+            </a:r>
+            <a:r>
+              <a:rPr/>
+              <a:t>Ребро (связь) — признак "requires" (требуется для установки).</a:t>
+            </a:r>
+            <a:r>
+              <a:rPr/>
+              <a:t>В данном случае наличие этой связи показывает, что модуль a необходим для установки модуля b.</a:t>
+            </a:r>
+            <a:r>
+              <a:rPr/>
+              <a:t>Анализ: самые необходимые модули (те, что чаще всего требуются для установки других), модули, зависящие от наибольшего количества других модулей и т.д.</a:t>
+            </a:r>
+          </a:p>
+        </p:txBody>
+      </p:sp>
+      <p:pic>
+        <p:nvPicPr>
+          <p:cNvPr id="4" name="Picture 3" descr="graph_viz.png"/>
+          <p:cNvPicPr>
+            <a:picLocks noChangeAspect="1"/>
+          </p:cNvPicPr>
+          <p:nvPr/>
+        </p:nvPicPr>
+        <p:blipFill>
+          <a:blip r:embed="rId2"/>
+          <a:stretch>
+            <a:fillRect/>
+          </a:stretch>
+        </p:blipFill>
+        <p:spPr>
+          <a:xfrm>
+            <a:off x="2377440" y="3794760"/>
+            <a:ext cx="4389120" cy="2743200"/>
+          </a:xfrm>
+          <a:prstGeom prst="rect">
+            <a:avLst/>
+          </a:prstGeom>
+        </p:spPr>
+      </p:pic>
     </p:spTree>
   </p:cSld>
   <p:clrMapOvr>
@@ -3825,7 +3999,7 @@
           <a:p>
             <a:r>
               <a:rPr/>
-              <a:t>Итоги</a:t>
+              <a:t>Дальнейшее развитие</a:t>
             </a:r>
           </a:p>
         </p:txBody>
@@ -3850,11 +4024,11 @@
             </a:pPr>
             <a:r>
               <a:rPr/>
-              <a:t>Предложено решение задачи.</a:t>
-            </a:r>
-            <a:r>
-              <a:rPr/>
-              <a:t>Реализован программный комплекс (движок + приложение). Движок — хранение графов и обработка пользовательских запросов, приложение — более удобная работа с БД, демонстрация возможностей движка.</a:t>
+              <a:t>Реализация алгоритмов поиска (обход соседей, кратчайший путь и др.).</a:t>
+            </a:r>
+            <a:r>
+              <a:rPr/>
+              <a:t>Разработка веб-интерфейса как замена нынешнего клиента с целью увеличения количества поддерживаемых платформ.</a:t>
             </a:r>
           </a:p>
         </p:txBody>

--- a/docs/презентация.pptx
+++ b/docs/презентация.pptx
@@ -3115,7 +3115,7 @@
           <a:p>
             <a:r>
               <a:rPr/>
-              <a:t>Графовая СУБД: курсовая работа</a:t>
+              <a:t>Разработка программного комплекса для работы с графовыми базами данных</a:t>
             </a:r>
           </a:p>
         </p:txBody>
@@ -3137,7 +3137,98 @@
           <a:p>
             <a:r>
               <a:rPr/>
-              <a:t>Хранение и редактирование графов (Neo4j + клиент wxPython)</a:t>
+              <a:t>Московский Государственный Психолого-педогогический Университет</a:t>
+            </a:r>
+          </a:p>
+        </p:txBody>
+      </p:sp>
+      <p:sp>
+        <p:nvSpPr>
+          <p:cNvPr id="4" name="TextBox 3"/>
+          <p:cNvSpPr txBox="1"/>
+          <p:nvPr/>
+        </p:nvSpPr>
+        <p:spPr>
+          <a:xfrm>
+            <a:off x="6400800" y="6400800"/>
+            <a:ext cx="1828800" cy="1828800"/>
+          </a:xfrm>
+          <a:prstGeom prst="rect">
+            <a:avLst/>
+          </a:prstGeom>
+          <a:noFill/>
+        </p:spPr>
+        <p:txBody>
+          <a:bodyPr wrap="none">
+            <a:spAutoFit/>
+          </a:bodyPr>
+          <a:lstStyle/>
+          <a:p>
+            <a:r>
+              <a:rPr/>
+              <a:t/>
+            </a:r>
+            <a:r>
+              <a:rPr/>
+              <a:t>Выполнил: Шигабутдинов Т.А.</a:t>
+            </a:r>
+          </a:p>
+        </p:txBody>
+      </p:sp>
+      <p:sp>
+        <p:nvSpPr>
+          <p:cNvPr id="5" name="TextBox 4"/>
+          <p:cNvSpPr txBox="1"/>
+          <p:nvPr/>
+        </p:nvSpPr>
+        <p:spPr>
+          <a:xfrm>
+            <a:off x="10058400" y="10058400"/>
+            <a:ext cx="1828800" cy="1828800"/>
+          </a:xfrm>
+          <a:prstGeom prst="rect">
+            <a:avLst/>
+          </a:prstGeom>
+          <a:noFill/>
+        </p:spPr>
+        <p:txBody>
+          <a:bodyPr wrap="none">
+            <a:spAutoFit/>
+          </a:bodyPr>
+          <a:lstStyle/>
+          <a:p>
+            <a:r>
+              <a:rPr/>
+              <a:t>Научный руководитель: Колотовкин И.С.</a:t>
+            </a:r>
+          </a:p>
+        </p:txBody>
+      </p:sp>
+      <p:sp>
+        <p:nvSpPr>
+          <p:cNvPr id="6" name="TextBox 5"/>
+          <p:cNvSpPr txBox="1"/>
+          <p:nvPr/>
+        </p:nvSpPr>
+        <p:spPr>
+          <a:xfrm>
+            <a:off x="13716000" y="13716000"/>
+            <a:ext cx="1828800" cy="1828800"/>
+          </a:xfrm>
+          <a:prstGeom prst="rect">
+            <a:avLst/>
+          </a:prstGeom>
+          <a:noFill/>
+        </p:spPr>
+        <p:txBody>
+          <a:bodyPr wrap="none">
+            <a:spAutoFit/>
+          </a:bodyPr>
+          <a:lstStyle/>
+          <a:p>
+            <a:r>
+              <a:rPr/>
+              <a:t>Москва, 2025</a:t>
             </a:r>
           </a:p>
         </p:txBody>
